--- a/08_09/09_eloadas_Angular_HTTP_kommunikacio.pptx
+++ b/08_09/09_eloadas_Angular_HTTP_kommunikacio.pptx
@@ -207,7 +207,7 @@
           <a:p>
             <a:fld id="{4C482E4E-5CEC-44A9-BF2B-512FB3B5604F}" type="datetimeFigureOut">
               <a:rPr lang="en-US" smtClean="0"/>
-              <a:t>1/18/2026</a:t>
+              <a:t>4/11/2026</a:t>
             </a:fld>
             <a:endParaRPr lang="en-US"/>
           </a:p>
@@ -6173,15 +6173,15 @@
             </a:r>
             <a:r>
               <a:rPr lang="hu-HU" dirty="0"/>
-              <a:t>, átalakíthatja felhasználó barát </a:t>
-            </a:r>
-            <a:r>
-              <a:rPr lang="hu-HU" dirty="0" err="1"/>
-              <a:t>formátumb</a:t>
+              <a:t>, átalakíthatja felhasználó </a:t>
+            </a:r>
+            <a:r>
+              <a:rPr lang="hu-HU"/>
+              <a:t>barát formátumba, </a:t>
             </a:r>
             <a:r>
               <a:rPr lang="hu-HU" dirty="0"/>
-              <a:t>, stb. A komponens csak reagál, és megjeleníti a hibaüzenetet. </a:t>
+              <a:t>stb. A komponens csak reagál, és megjeleníti a hibaüzenetet. </a:t>
             </a:r>
             <a:r>
               <a:rPr lang="en-US" dirty="0"/>
@@ -6971,7 +6971,7 @@
           <a:p>
             <a:fld id="{E80C50CD-E178-4744-9B35-B2F624D6C5E9}" type="datetimeFigureOut">
               <a:rPr lang="en-US" smtClean="0"/>
-              <a:t>1/18/2026</a:t>
+              <a:t>4/11/2026</a:t>
             </a:fld>
             <a:endParaRPr lang="en-US"/>
           </a:p>
@@ -7169,7 +7169,7 @@
           <a:p>
             <a:fld id="{E80C50CD-E178-4744-9B35-B2F624D6C5E9}" type="datetimeFigureOut">
               <a:rPr lang="en-US" smtClean="0"/>
-              <a:t>1/18/2026</a:t>
+              <a:t>4/11/2026</a:t>
             </a:fld>
             <a:endParaRPr lang="en-US"/>
           </a:p>
@@ -7377,7 +7377,7 @@
           <a:p>
             <a:fld id="{E80C50CD-E178-4744-9B35-B2F624D6C5E9}" type="datetimeFigureOut">
               <a:rPr lang="en-US" smtClean="0"/>
-              <a:t>1/18/2026</a:t>
+              <a:t>4/11/2026</a:t>
             </a:fld>
             <a:endParaRPr lang="en-US"/>
           </a:p>
@@ -7627,7 +7627,7 @@
           <a:p>
             <a:fld id="{E80C50CD-E178-4744-9B35-B2F624D6C5E9}" type="datetimeFigureOut">
               <a:rPr lang="en-US" smtClean="0"/>
-              <a:t>1/18/2026</a:t>
+              <a:t>4/11/2026</a:t>
             </a:fld>
             <a:endParaRPr lang="en-US"/>
           </a:p>
@@ -7906,7 +7906,7 @@
           <a:p>
             <a:fld id="{E80C50CD-E178-4744-9B35-B2F624D6C5E9}" type="datetimeFigureOut">
               <a:rPr lang="en-US" smtClean="0"/>
-              <a:t>1/18/2026</a:t>
+              <a:t>4/11/2026</a:t>
             </a:fld>
             <a:endParaRPr lang="en-US"/>
           </a:p>
@@ -8223,7 +8223,7 @@
           <a:p>
             <a:fld id="{E80C50CD-E178-4744-9B35-B2F624D6C5E9}" type="datetimeFigureOut">
               <a:rPr lang="en-US" smtClean="0"/>
-              <a:t>1/18/2026</a:t>
+              <a:t>4/11/2026</a:t>
             </a:fld>
             <a:endParaRPr lang="en-US"/>
           </a:p>
@@ -8639,7 +8639,7 @@
           <a:p>
             <a:fld id="{E80C50CD-E178-4744-9B35-B2F624D6C5E9}" type="datetimeFigureOut">
               <a:rPr lang="en-US" smtClean="0"/>
-              <a:t>1/18/2026</a:t>
+              <a:t>4/11/2026</a:t>
             </a:fld>
             <a:endParaRPr lang="en-US"/>
           </a:p>
@@ -8780,7 +8780,7 @@
           <a:p>
             <a:fld id="{E80C50CD-E178-4744-9B35-B2F624D6C5E9}" type="datetimeFigureOut">
               <a:rPr lang="en-US" smtClean="0"/>
-              <a:t>1/18/2026</a:t>
+              <a:t>4/11/2026</a:t>
             </a:fld>
             <a:endParaRPr lang="en-US"/>
           </a:p>
@@ -8893,7 +8893,7 @@
           <a:p>
             <a:fld id="{E80C50CD-E178-4744-9B35-B2F624D6C5E9}" type="datetimeFigureOut">
               <a:rPr lang="en-US" smtClean="0"/>
-              <a:t>1/18/2026</a:t>
+              <a:t>4/11/2026</a:t>
             </a:fld>
             <a:endParaRPr lang="en-US"/>
           </a:p>
@@ -9210,7 +9210,7 @@
           <a:p>
             <a:fld id="{E80C50CD-E178-4744-9B35-B2F624D6C5E9}" type="datetimeFigureOut">
               <a:rPr lang="en-US" smtClean="0"/>
-              <a:t>1/18/2026</a:t>
+              <a:t>4/11/2026</a:t>
             </a:fld>
             <a:endParaRPr lang="en-US"/>
           </a:p>
@@ -9502,7 +9502,7 @@
           <a:p>
             <a:fld id="{E80C50CD-E178-4744-9B35-B2F624D6C5E9}" type="datetimeFigureOut">
               <a:rPr lang="en-US" smtClean="0"/>
-              <a:t>1/18/2026</a:t>
+              <a:t>4/11/2026</a:t>
             </a:fld>
             <a:endParaRPr lang="en-US"/>
           </a:p>
@@ -9742,7 +9742,7 @@
             <a:fld id="{E80C50CD-E178-4744-9B35-B2F624D6C5E9}" type="datetimeFigureOut">
               <a:rPr lang="en-US" smtClean="0"/>
               <a:pPr/>
-              <a:t>1/18/2026</a:t>
+              <a:t>4/11/2026</a:t>
             </a:fld>
             <a:endParaRPr lang="en-US"/>
           </a:p>

--- a/08_09/09_eloadas_Angular_HTTP_kommunikacio.pptx
+++ b/08_09/09_eloadas_Angular_HTTP_kommunikacio.pptx
@@ -207,7 +207,7 @@
           <a:p>
             <a:fld id="{4C482E4E-5CEC-44A9-BF2B-512FB3B5604F}" type="datetimeFigureOut">
               <a:rPr lang="en-US" smtClean="0"/>
-              <a:t>4/11/2026</a:t>
+              <a:t>4/12/2026</a:t>
             </a:fld>
             <a:endParaRPr lang="en-US"/>
           </a:p>
@@ -6971,7 +6971,7 @@
           <a:p>
             <a:fld id="{E80C50CD-E178-4744-9B35-B2F624D6C5E9}" type="datetimeFigureOut">
               <a:rPr lang="en-US" smtClean="0"/>
-              <a:t>4/11/2026</a:t>
+              <a:t>4/12/2026</a:t>
             </a:fld>
             <a:endParaRPr lang="en-US"/>
           </a:p>
@@ -7169,7 +7169,7 @@
           <a:p>
             <a:fld id="{E80C50CD-E178-4744-9B35-B2F624D6C5E9}" type="datetimeFigureOut">
               <a:rPr lang="en-US" smtClean="0"/>
-              <a:t>4/11/2026</a:t>
+              <a:t>4/12/2026</a:t>
             </a:fld>
             <a:endParaRPr lang="en-US"/>
           </a:p>
@@ -7377,7 +7377,7 @@
           <a:p>
             <a:fld id="{E80C50CD-E178-4744-9B35-B2F624D6C5E9}" type="datetimeFigureOut">
               <a:rPr lang="en-US" smtClean="0"/>
-              <a:t>4/11/2026</a:t>
+              <a:t>4/12/2026</a:t>
             </a:fld>
             <a:endParaRPr lang="en-US"/>
           </a:p>
@@ -7627,7 +7627,7 @@
           <a:p>
             <a:fld id="{E80C50CD-E178-4744-9B35-B2F624D6C5E9}" type="datetimeFigureOut">
               <a:rPr lang="en-US" smtClean="0"/>
-              <a:t>4/11/2026</a:t>
+              <a:t>4/12/2026</a:t>
             </a:fld>
             <a:endParaRPr lang="en-US"/>
           </a:p>
@@ -7906,7 +7906,7 @@
           <a:p>
             <a:fld id="{E80C50CD-E178-4744-9B35-B2F624D6C5E9}" type="datetimeFigureOut">
               <a:rPr lang="en-US" smtClean="0"/>
-              <a:t>4/11/2026</a:t>
+              <a:t>4/12/2026</a:t>
             </a:fld>
             <a:endParaRPr lang="en-US"/>
           </a:p>
@@ -8223,7 +8223,7 @@
           <a:p>
             <a:fld id="{E80C50CD-E178-4744-9B35-B2F624D6C5E9}" type="datetimeFigureOut">
               <a:rPr lang="en-US" smtClean="0"/>
-              <a:t>4/11/2026</a:t>
+              <a:t>4/12/2026</a:t>
             </a:fld>
             <a:endParaRPr lang="en-US"/>
           </a:p>
@@ -8639,7 +8639,7 @@
           <a:p>
             <a:fld id="{E80C50CD-E178-4744-9B35-B2F624D6C5E9}" type="datetimeFigureOut">
               <a:rPr lang="en-US" smtClean="0"/>
-              <a:t>4/11/2026</a:t>
+              <a:t>4/12/2026</a:t>
             </a:fld>
             <a:endParaRPr lang="en-US"/>
           </a:p>
@@ -8780,7 +8780,7 @@
           <a:p>
             <a:fld id="{E80C50CD-E178-4744-9B35-B2F624D6C5E9}" type="datetimeFigureOut">
               <a:rPr lang="en-US" smtClean="0"/>
-              <a:t>4/11/2026</a:t>
+              <a:t>4/12/2026</a:t>
             </a:fld>
             <a:endParaRPr lang="en-US"/>
           </a:p>
@@ -8893,7 +8893,7 @@
           <a:p>
             <a:fld id="{E80C50CD-E178-4744-9B35-B2F624D6C5E9}" type="datetimeFigureOut">
               <a:rPr lang="en-US" smtClean="0"/>
-              <a:t>4/11/2026</a:t>
+              <a:t>4/12/2026</a:t>
             </a:fld>
             <a:endParaRPr lang="en-US"/>
           </a:p>
@@ -9210,7 +9210,7 @@
           <a:p>
             <a:fld id="{E80C50CD-E178-4744-9B35-B2F624D6C5E9}" type="datetimeFigureOut">
               <a:rPr lang="en-US" smtClean="0"/>
-              <a:t>4/11/2026</a:t>
+              <a:t>4/12/2026</a:t>
             </a:fld>
             <a:endParaRPr lang="en-US"/>
           </a:p>
@@ -9502,7 +9502,7 @@
           <a:p>
             <a:fld id="{E80C50CD-E178-4744-9B35-B2F624D6C5E9}" type="datetimeFigureOut">
               <a:rPr lang="en-US" smtClean="0"/>
-              <a:t>4/11/2026</a:t>
+              <a:t>4/12/2026</a:t>
             </a:fld>
             <a:endParaRPr lang="en-US"/>
           </a:p>
@@ -9742,7 +9742,7 @@
             <a:fld id="{E80C50CD-E178-4744-9B35-B2F624D6C5E9}" type="datetimeFigureOut">
               <a:rPr lang="en-US" smtClean="0"/>
               <a:pPr/>
-              <a:t>4/11/2026</a:t>
+              <a:t>4/12/2026</a:t>
             </a:fld>
             <a:endParaRPr lang="en-US"/>
           </a:p>
@@ -11456,7 +11456,7 @@
         <p:spPr bwMode="auto">
           <a:xfrm>
             <a:off x="521208" y="2201508"/>
-            <a:ext cx="6551432" cy="2793842"/>
+            <a:ext cx="10451592" cy="2793842"/>
           </a:xfrm>
           <a:prstGeom prst="rect">
             <a:avLst/>
@@ -11938,6 +11938,19 @@
                 <a:latin typeface="Arial" panose="020B0604020202020204" pitchFamily="34" charset="0"/>
               </a:rPr>
               <a:t>szabályok</a:t>
+            </a:r>
+            <a:r>
+              <a:rPr kumimoji="0" lang="hu-HU" altLang="en-US" sz="2400" b="0" i="0" u="none" strike="noStrike" cap="none" normalizeH="0" baseline="0" dirty="0">
+                <a:ln>
+                  <a:noFill/>
+                </a:ln>
+                <a:solidFill>
+                  <a:schemeClr val="tx1"/>
+                </a:solidFill>
+                <a:effectLst/>
+                <a:latin typeface="Arial" panose="020B0604020202020204" pitchFamily="34" charset="0"/>
+              </a:rPr>
+              <a:t> a HTTP kérésekre és válaszokra</a:t>
             </a:r>
             <a:endParaRPr kumimoji="0" lang="en-US" altLang="en-US" sz="2400" b="0" i="0" u="none" strike="noStrike" cap="none" normalizeH="0" baseline="0" dirty="0">
               <a:ln>
@@ -13757,7 +13770,7 @@
         <p:spPr bwMode="auto">
           <a:xfrm>
             <a:off x="521208" y="2283715"/>
-            <a:ext cx="6018488" cy="2793842"/>
+            <a:ext cx="6231284" cy="2793842"/>
           </a:xfrm>
           <a:prstGeom prst="rect">
             <a:avLst/>
@@ -13990,7 +14003,7 @@
                 <a:effectLst/>
                 <a:latin typeface="Arial" panose="020B0604020202020204" pitchFamily="34" charset="0"/>
               </a:rPr>
-              <a:t>az adatfolyamra</a:t>
+              <a:t>az aszinkron adatfolyamra</a:t>
             </a:r>
             <a:endParaRPr kumimoji="0" lang="en-US" altLang="en-US" sz="2400" b="0" i="0" u="none" strike="noStrike" cap="none" normalizeH="0" baseline="0" dirty="0">
               <a:ln>
